--- a/system-design-101/vi/lessons/sd-02-005/slides/sd-02-005.pptx
+++ b/system-design-101/vi/lessons/sd-02-005/slides/sd-02-005.pptx
@@ -1790,7 +1790,7 @@
         <p:spPr>
           <a:xfrm>
             <a:off x="914400" y="1428750"/>
-            <a:ext cx="9334500" cy="3600450"/>
+            <a:ext cx="9334500" cy="3619500"/>
           </a:xfrm>
           <a:prstGeom prst="rect">
             <a:avLst/>
@@ -1799,17 +1799,17 @@
           <a:ln/>
         </p:spPr>
         <p:txBody>
-          <a:bodyPr wrap="square" lIns="0" tIns="69342" rIns="0" bIns="-69342" rtlCol="0" anchor="t"/>
+          <a:bodyPr wrap="square" lIns="0" tIns="72009" rIns="0" bIns="-72009" rtlCol="0" anchor="t"/>
           <a:lstStyle/>
           <a:p>
             <a:pPr algn="l" indent="0" marL="0">
               <a:lnSpc>
-                <a:spcPts val="8112"/>
+                <a:spcPts val="8424"/>
               </a:lnSpc>
               <a:buNone/>
             </a:pPr>
             <a:r>
-              <a:rPr lang="en-US" sz="7800" dirty="0" spc="2" kern="0">
+              <a:rPr lang="en-US" sz="8100" dirty="0" spc="2" kern="0">
                 <a:solidFill>
                   <a:srgbClr val="F3EEE3"/>
                 </a:solidFill>
@@ -1817,10 +1817,10 @@
                 <a:ea typeface="Bricolage Grotesque ExtraBold" pitchFamily="34" charset="-122"/>
                 <a:cs typeface="Bricolage Grotesque ExtraBold" pitchFamily="34" charset="-120"/>
               </a:rPr>
-              <a:t>SapFix:</a:t>
-            </a:r>
-            <a:r>
-              <a:rPr lang="en-US" sz="7800" dirty="0" spc="1" kern="0">
+              <a:t>SapFix: máy</a:t>
+            </a:r>
+            <a:r>
+              <a:rPr lang="en-US" sz="8100" dirty="0" spc="20" kern="0">
                 <a:solidFill>
                   <a:srgbClr val="F3EEE3"/>
                 </a:solidFill>
@@ -1828,10 +1828,10 @@
                 <a:ea typeface="Bricolage Grotesque ExtraBold" pitchFamily="34" charset="-122"/>
                 <a:cs typeface="Bricolage Grotesque ExtraBold" pitchFamily="34" charset="-120"/>
               </a:rPr>
-              <a:t> máy</a:t>
-            </a:r>
-            <a:r>
-              <a:rPr lang="en-US" sz="7800" dirty="0" spc="22" kern="0">
+              <a:t> đề</a:t>
+            </a:r>
+            <a:r>
+              <a:rPr lang="en-US" sz="8100" dirty="0" spc="12" kern="0">
                 <a:solidFill>
                   <a:srgbClr val="F3EEE3"/>
                 </a:solidFill>
@@ -1839,10 +1839,10 @@
                 <a:ea typeface="Bricolage Grotesque ExtraBold" pitchFamily="34" charset="-122"/>
                 <a:cs typeface="Bricolage Grotesque ExtraBold" pitchFamily="34" charset="-120"/>
               </a:rPr>
-              <a:t> đề</a:t>
-            </a:r>
-            <a:r>
-              <a:rPr lang="en-US" sz="7800" dirty="0" spc="9" kern="0">
+              <a:t> xuất,</a:t>
+            </a:r>
+            <a:r>
+              <a:rPr lang="en-US" sz="8100" dirty="0" spc="-80" kern="0">
                 <a:solidFill>
                   <a:srgbClr val="F3EEE3"/>
                 </a:solidFill>
@@ -1850,10 +1850,10 @@
                 <a:ea typeface="Bricolage Grotesque ExtraBold" pitchFamily="34" charset="-122"/>
                 <a:cs typeface="Bricolage Grotesque ExtraBold" pitchFamily="34" charset="-120"/>
               </a:rPr>
-              <a:t> xuất,</a:t>
-            </a:r>
-            <a:r>
-              <a:rPr lang="en-US" sz="7800" dirty="0" spc="-75" kern="0">
+              <a:t> người</a:t>
+            </a:r>
+            <a:r>
+              <a:rPr lang="en-US" sz="8100" dirty="0" spc="1" kern="0">
                 <a:solidFill>
                   <a:srgbClr val="F3EEE3"/>
                 </a:solidFill>
@@ -1861,10 +1861,10 @@
                 <a:ea typeface="Bricolage Grotesque ExtraBold" pitchFamily="34" charset="-122"/>
                 <a:cs typeface="Bricolage Grotesque ExtraBold" pitchFamily="34" charset="-120"/>
               </a:rPr>
-              <a:t> người</a:t>
-            </a:r>
-            <a:r>
-              <a:rPr lang="en-US" sz="7800" dirty="0" spc="-1" kern="0">
+              <a:t> quyết</a:t>
+            </a:r>
+            <a:r>
+              <a:rPr lang="en-US" sz="8100" dirty="0" spc="25" kern="0">
                 <a:solidFill>
                   <a:srgbClr val="F3EEE3"/>
                 </a:solidFill>
@@ -1872,20 +1872,9 @@
                 <a:ea typeface="Bricolage Grotesque ExtraBold" pitchFamily="34" charset="-122"/>
                 <a:cs typeface="Bricolage Grotesque ExtraBold" pitchFamily="34" charset="-120"/>
               </a:rPr>
-              <a:t> quyết</a:t>
-            </a:r>
-            <a:r>
-              <a:rPr lang="en-US" sz="7800" dirty="0" spc="24" kern="0">
-                <a:solidFill>
-                  <a:srgbClr val="F3EEE3"/>
-                </a:solidFill>
-                <a:latin typeface="Bricolage Grotesque ExtraBold" pitchFamily="34" charset="0"/>
-                <a:ea typeface="Bricolage Grotesque ExtraBold" pitchFamily="34" charset="-122"/>
-                <a:cs typeface="Bricolage Grotesque ExtraBold" pitchFamily="34" charset="-120"/>
-              </a:rPr>
               <a:t> định</a:t>
             </a:r>
-            <a:endParaRPr lang="en-US" sz="7800" dirty="0"/>
+            <a:endParaRPr lang="en-US" sz="8100" dirty="0"/>
           </a:p>
         </p:txBody>
       </p:sp>

--- a/system-design-101/vi/lessons/sd-02-005/slides/sd-02-005.pptx
+++ b/system-design-101/vi/lessons/sd-02-005/slides/sd-02-005.pptx
@@ -6556,6 +6556,28 @@
               <a:buNone/>
             </a:pPr>
             <a:r>
+              <a:rPr lang="en-US" sz="2550" dirty="0" spc="-4" kern="0">
+                <a:solidFill>
+                  <a:srgbClr val="14161C"/>
+                </a:solidFill>
+                <a:latin typeface="Be Vietnam Pro" pitchFamily="34" charset="0"/>
+                <a:ea typeface="Be Vietnam Pro" pitchFamily="34" charset="-122"/>
+                <a:cs typeface="Be Vietnam Pro" pitchFamily="34" charset="-120"/>
+              </a:rPr>
+              <a:t>Theo</a:t>
+            </a:r>
+            <a:r>
+              <a:rPr lang="en-US" sz="2550" dirty="0" spc="0" kern="0">
+                <a:solidFill>
+                  <a:srgbClr val="14161C"/>
+                </a:solidFill>
+                <a:latin typeface="Be Vietnam Pro" pitchFamily="34" charset="0"/>
+                <a:ea typeface="Be Vietnam Pro" pitchFamily="34" charset="-122"/>
+                <a:cs typeface="Be Vietnam Pro" pitchFamily="34" charset="-120"/>
+              </a:rPr>
+              <a:t> nguồn,</a:t>
+            </a:r>
+            <a:r>
               <a:rPr lang="en-US" sz="2550" dirty="0" spc="-1" kern="0">
                 <a:solidFill>
                   <a:srgbClr val="14161C"/>
@@ -6564,7 +6586,7 @@
                 <a:ea typeface="Be Vietnam Pro" pitchFamily="34" charset="-122"/>
                 <a:cs typeface="Be Vietnam Pro" pitchFamily="34" charset="-120"/>
               </a:rPr>
-              <a:t>SapFix</a:t>
+              <a:t> SapFix</a:t>
             </a:r>
             <a:r>
               <a:rPr lang="en-US" sz="2550" dirty="0" spc="0" kern="0">
@@ -6600,6 +6622,17 @@
               <a:t> kiểm</a:t>
             </a:r>
             <a:r>
+              <a:rPr lang="en-US" sz="2550" dirty="0" spc="0" kern="0">
+                <a:solidFill>
+                  <a:srgbClr val="14161C"/>
+                </a:solidFill>
+                <a:latin typeface="Be Vietnam Pro" pitchFamily="34" charset="0"/>
+                <a:ea typeface="Be Vietnam Pro" pitchFamily="34" charset="-122"/>
+                <a:cs typeface="Be Vietnam Pro" pitchFamily="34" charset="-120"/>
+              </a:rPr>
+              <a:t> thử</a:t>
+            </a:r>
+            <a:r>
               <a:rPr lang="en-US" sz="2550" dirty="0" spc="-1" kern="0">
                 <a:solidFill>
                   <a:srgbClr val="14161C"/>
@@ -6608,43 +6641,10 @@
                 <a:ea typeface="Be Vietnam Pro" pitchFamily="34" charset="-122"/>
                 <a:cs typeface="Be Vietnam Pro" pitchFamily="34" charset="-120"/>
               </a:rPr>
-              <a:t> thử</a:t>
-            </a:r>
-            <a:r>
-              <a:rPr lang="en-US" sz="2550" dirty="0" spc="-2" kern="0">
-                <a:solidFill>
-                  <a:srgbClr val="14161C"/>
-                </a:solidFill>
-                <a:latin typeface="Be Vietnam Pro" pitchFamily="34" charset="0"/>
-                <a:ea typeface="Be Vietnam Pro" pitchFamily="34" charset="-122"/>
-                <a:cs typeface="Be Vietnam Pro" pitchFamily="34" charset="-120"/>
-              </a:rPr>
-              <a:t> phù</a:t>
-            </a:r>
-            <a:r>
-              <a:rPr lang="en-US" sz="2550" dirty="0" spc="0" kern="0">
-                <a:solidFill>
-                  <a:srgbClr val="14161C"/>
-                </a:solidFill>
-                <a:latin typeface="Be Vietnam Pro" pitchFamily="34" charset="0"/>
-                <a:ea typeface="Be Vietnam Pro" pitchFamily="34" charset="-122"/>
-                <a:cs typeface="Be Vietnam Pro" pitchFamily="34" charset="-120"/>
-              </a:rPr>
-              <a:t> hợp</a:t>
-            </a:r>
-            <a:r>
-              <a:rPr lang="en-US" sz="2550" dirty="0" spc="-1" kern="0">
-                <a:solidFill>
-                  <a:srgbClr val="14161C"/>
-                </a:solidFill>
-                <a:latin typeface="Be Vietnam Pro" pitchFamily="34" charset="0"/>
-                <a:ea typeface="Be Vietnam Pro" pitchFamily="34" charset="-122"/>
-                <a:cs typeface="Be Vietnam Pro" pitchFamily="34" charset="-120"/>
-              </a:rPr>
               <a:t> từ</a:t>
             </a:r>
             <a:r>
-              <a:rPr lang="en-US" sz="2550" dirty="0" spc="4" kern="0">
+              <a:rPr lang="en-US" sz="2550" dirty="0" spc="3" kern="0">
                 <a:solidFill>
                   <a:srgbClr val="14161C"/>
                 </a:solidFill>
